--- a/PPTs/Lecture 14 - DNS.pptx
+++ b/PPTs/Lecture 14 - DNS.pptx
@@ -18119,90 +18119,6 @@
       </p:sp>
       <p:sp>
         <p:nvSpPr>
-          <p:cNvPr id="143" name="Google Shape;143;p24"/>
-          <p:cNvSpPr txBox="1"/>
-          <p:nvPr/>
-        </p:nvSpPr>
-        <p:spPr>
-          <a:xfrm>
-            <a:off x="311700" y="3854350"/>
-            <a:ext cx="8520600" cy="808800"/>
-          </a:xfrm>
-          <a:prstGeom prst="rect">
-            <a:avLst/>
-          </a:prstGeom>
-          <a:noFill/>
-          <a:ln>
-            <a:noFill/>
-          </a:ln>
-        </p:spPr>
-        <p:txBody>
-          <a:bodyPr spcFirstLastPara="1" wrap="square" lIns="91425" tIns="91425" rIns="91425" bIns="91425" anchor="t" anchorCtr="0">
-            <a:noAutofit/>
-          </a:bodyPr>
-          <a:lstStyle/>
-          <a:p>
-            <a:pPr marL="0" lvl="0" indent="0" algn="l" rtl="0">
-              <a:spcBef>
-                <a:spcPts val="600"/>
-              </a:spcBef>
-              <a:spcAft>
-                <a:spcPts val="0"/>
-              </a:spcAft>
-              <a:buNone/>
-            </a:pPr>
-            <a:r>
-              <a:rPr lang="en-US" sz="1600" dirty="0">
-                <a:latin typeface="Roboto Medium"/>
-                <a:ea typeface="Roboto Medium"/>
-                <a:cs typeface="Roboto Medium"/>
-                <a:sym typeface="Roboto Medium"/>
-              </a:rPr>
-              <a:t>CSC 175, Spring 2026</a:t>
-            </a:r>
-            <a:endParaRPr sz="1600" dirty="0">
-              <a:solidFill>
-                <a:srgbClr val="000000"/>
-              </a:solidFill>
-              <a:latin typeface="Roboto Medium"/>
-              <a:ea typeface="Roboto Medium"/>
-              <a:cs typeface="Roboto Medium"/>
-              <a:sym typeface="Roboto Medium"/>
-            </a:endParaRPr>
-          </a:p>
-          <a:p>
-            <a:pPr marL="0" lvl="0" indent="0" algn="l" rtl="0">
-              <a:spcBef>
-                <a:spcPts val="600"/>
-              </a:spcBef>
-              <a:spcAft>
-                <a:spcPts val="0"/>
-              </a:spcAft>
-              <a:buNone/>
-            </a:pPr>
-            <a:r>
-              <a:rPr lang="en" sz="1600" dirty="0">
-                <a:latin typeface="Roboto Light"/>
-                <a:ea typeface="Roboto Light"/>
-                <a:cs typeface="Roboto Light"/>
-                <a:sym typeface="Roboto Light"/>
-              </a:rPr>
-              <a:t>Slides credit: Sylvia Ratnasamy, Rob Shakir, Peyrin Kao, Nicholas Ngai, Nicholas Weaver</a:t>
-            </a:r>
-            <a:endParaRPr sz="1600" dirty="0">
-              <a:solidFill>
-                <a:srgbClr val="000000"/>
-              </a:solidFill>
-              <a:latin typeface="Roboto Light"/>
-              <a:ea typeface="Roboto Light"/>
-              <a:cs typeface="Roboto Light"/>
-              <a:sym typeface="Roboto Light"/>
-            </a:endParaRPr>
-          </a:p>
-        </p:txBody>
-      </p:sp>
-      <p:sp>
-        <p:nvSpPr>
           <p:cNvPr id="144" name="Google Shape;144;p24"/>
           <p:cNvSpPr txBox="1"/>
           <p:nvPr/>
@@ -18345,6 +18261,49 @@
           </a:ln>
         </p:spPr>
       </p:pic>
+      <p:sp>
+        <p:nvSpPr>
+          <p:cNvPr id="2" name="Google Shape;143;p24">
+            <a:extLst>
+              <a:ext uri="{FF2B5EF4-FFF2-40B4-BE49-F238E27FC236}">
+                <a16:creationId xmlns:a16="http://schemas.microsoft.com/office/drawing/2014/main" id="{A31C9CDF-69BC-6922-DE84-8CC6E52A82EE}"/>
+              </a:ext>
+            </a:extLst>
+          </p:cNvPr>
+          <p:cNvSpPr txBox="1"/>
+          <p:nvPr/>
+        </p:nvSpPr>
+        <p:spPr>
+          <a:xfrm>
+            <a:off x="311700" y="3854350"/>
+            <a:ext cx="8520600" cy="658500"/>
+          </a:xfrm>
+          <a:prstGeom prst="rect">
+            <a:avLst/>
+          </a:prstGeom>
+          <a:noFill/>
+          <a:ln>
+            <a:noFill/>
+          </a:ln>
+        </p:spPr>
+        <p:txBody>
+          <a:bodyPr spcFirstLastPara="1" wrap="square" lIns="91425" tIns="91425" rIns="91425" bIns="91425" anchor="t" anchorCtr="0">
+            <a:noAutofit/>
+          </a:bodyPr>
+          <a:lstStyle/>
+          <a:p>
+            <a:pPr lvl="0">
+              <a:spcBef>
+                <a:spcPts val="600"/>
+              </a:spcBef>
+            </a:pPr>
+            <a:r>
+              <a:rPr lang="en-US" altLang="zh-CN" sz="1600" dirty="0"/>
+              <a:t>Lecture 14, Spring 2026</a:t>
+            </a:r>
+          </a:p>
+        </p:txBody>
+      </p:sp>
     </p:spTree>
   </p:cSld>
   <p:clrMapOvr>
@@ -31842,15 +31801,15 @@
               <a:buNone/>
             </a:pPr>
             <a:r>
-              <a:rPr lang="en">
+              <a:rPr lang="nl-NL" dirty="0">
                 <a:latin typeface="Roboto"/>
                 <a:ea typeface="Roboto"/>
                 <a:cs typeface="Roboto"/>
                 <a:sym typeface="Roboto"/>
               </a:rPr>
-              <a:t>berkeley</a:t>
-            </a:r>
-            <a:endParaRPr>
+              <a:t>hofstra</a:t>
+            </a:r>
+            <a:endParaRPr dirty="0">
               <a:latin typeface="Roboto"/>
               <a:ea typeface="Roboto"/>
               <a:cs typeface="Roboto"/>
@@ -32935,15 +32894,15 @@
               <a:buNone/>
             </a:pPr>
             <a:r>
-              <a:rPr lang="en">
+              <a:rPr lang="nl-NL" dirty="0">
                 <a:latin typeface="Roboto"/>
                 <a:ea typeface="Roboto"/>
                 <a:cs typeface="Roboto"/>
                 <a:sym typeface="Roboto"/>
               </a:rPr>
-              <a:t>berkeley</a:t>
-            </a:r>
-            <a:endParaRPr>
+              <a:t>hofstra</a:t>
+            </a:r>
+            <a:endParaRPr dirty="0">
               <a:latin typeface="Roboto"/>
               <a:ea typeface="Roboto"/>
               <a:cs typeface="Roboto"/>
@@ -33615,7 +33574,31 @@
                 <a:cs typeface="Roboto"/>
                 <a:sym typeface="Roboto"/>
               </a:rPr>
-              <a:t>UC Berkeley owns the </a:t>
+              <a:t>H</a:t>
+            </a:r>
+            <a:r>
+              <a:rPr lang="nl-NL" dirty="0">
+                <a:solidFill>
+                  <a:schemeClr val="accent2"/>
+                </a:solidFill>
+                <a:latin typeface="Roboto"/>
+                <a:ea typeface="Roboto"/>
+                <a:cs typeface="Roboto"/>
+                <a:sym typeface="Roboto"/>
+              </a:rPr>
+              <a:t>ofstra</a:t>
+            </a:r>
+            <a:r>
+              <a:rPr lang="en" dirty="0">
+                <a:solidFill>
+                  <a:schemeClr val="accent2"/>
+                </a:solidFill>
+                <a:latin typeface="Roboto"/>
+                <a:ea typeface="Roboto"/>
+                <a:cs typeface="Roboto"/>
+                <a:sym typeface="Roboto"/>
+              </a:rPr>
+              <a:t> owns the </a:t>
             </a:r>
             <a:r>
               <a:rPr lang="en-US" dirty="0">
@@ -33707,7 +33690,31 @@
                 <a:cs typeface="Roboto"/>
                 <a:sym typeface="Roboto"/>
               </a:rPr>
-              <a:t>UC Berkeley gives the </a:t>
+              <a:t>H</a:t>
+            </a:r>
+            <a:r>
+              <a:rPr lang="nl-NL" dirty="0">
+                <a:solidFill>
+                  <a:schemeClr val="accent2"/>
+                </a:solidFill>
+                <a:latin typeface="Roboto"/>
+                <a:ea typeface="Roboto"/>
+                <a:cs typeface="Roboto"/>
+                <a:sym typeface="Roboto"/>
+              </a:rPr>
+              <a:t>ofstra</a:t>
+            </a:r>
+            <a:r>
+              <a:rPr lang="en" dirty="0">
+                <a:solidFill>
+                  <a:schemeClr val="accent2"/>
+                </a:solidFill>
+                <a:latin typeface="Roboto"/>
+                <a:ea typeface="Roboto"/>
+                <a:cs typeface="Roboto"/>
+                <a:sym typeface="Roboto"/>
+              </a:rPr>
+              <a:t> gives the </a:t>
             </a:r>
             <a:r>
               <a:rPr lang="en-US" dirty="0">
@@ -33986,15 +33993,15 @@
               <a:buNone/>
             </a:pPr>
             <a:r>
-              <a:rPr lang="en">
+              <a:rPr lang="nl-NL" dirty="0">
                 <a:latin typeface="Roboto"/>
                 <a:ea typeface="Roboto"/>
                 <a:cs typeface="Roboto"/>
                 <a:sym typeface="Roboto"/>
               </a:rPr>
-              <a:t>berkeley</a:t>
-            </a:r>
-            <a:endParaRPr>
+              <a:t>hofstra</a:t>
+            </a:r>
+            <a:endParaRPr dirty="0">
               <a:latin typeface="Roboto"/>
               <a:ea typeface="Roboto"/>
               <a:cs typeface="Roboto"/>
@@ -34927,7 +34934,16 @@
                 <a:cs typeface="Roboto"/>
                 <a:sym typeface="Roboto"/>
               </a:rPr>
-              <a:t>: UC Berkeley</a:t>
+              <a:t>: </a:t>
+            </a:r>
+            <a:r>
+              <a:rPr lang="nl-NL" sz="1200" dirty="0">
+                <a:latin typeface="Roboto"/>
+                <a:ea typeface="Roboto"/>
+                <a:cs typeface="Roboto"/>
+                <a:sym typeface="Roboto"/>
+              </a:rPr>
+              <a:t>Hofstra</a:t>
             </a:r>
             <a:endParaRPr sz="1200" dirty="0">
               <a:latin typeface="Roboto"/>
